--- a/curso_es/pptx/S83.pptx
+++ b/curso_es/pptx/S83.pptx
@@ -4799,7 +4799,7 @@
                 </a:solidFill>
                 <a:latin typeface="Nunito Sans"/>
               </a:rPr>
-              <a:t>En el vestuario, alguien le grita «¡Qué gay eres!» a Aitor por fallar un pase. Luego dice que solo era una broma.</a:t>
+              <a:t>En el vestuario, alguien le grita «¡Qué gay eres!» a un chico por fallar un pase. Luego dice que solo era una broma.</a:t>
             </a:r>
           </a:p>
         </p:txBody>
@@ -4872,7 +4872,7 @@
                 </a:solidFill>
                 <a:latin typeface="Nunito Sans"/>
               </a:rPr>
-              <a:t>¿A quién hace daño? A Aitor y a cualquier persona gay que lo oiga, aunque calle.</a:t>
+              <a:t>¿A quién hace daño? A ese chico y a cualquier persona gay que lo oiga, aunque calle.</a:t>
             </a:r>
           </a:p>
           <a:p>
@@ -5108,7 +5108,7 @@
                 </a:solidFill>
                 <a:latin typeface="Nunito Sans"/>
               </a:rPr>
-              <a:t>Kevin ve un vídeo de un cantante con las uñas pintadas y comenta: «Se nota que es gay».</a:t>
+              <a:t>Un chico ve un vídeo de un cantante con las uñas pintadas y comenta: «Se nota que es gay».</a:t>
             </a:r>
           </a:p>
         </p:txBody>
@@ -8200,7 +8200,7 @@
                 </a:solidFill>
                 <a:latin typeface="Nunito Sans"/>
               </a:rPr>
-              <a:t>Naiara le envió una foto privada a Iker cuando salían juntos. Ahora lo han dejado e Iker quiere reenviarla al grupo de la cuadrilla.</a:t>
+              <a:t>Una chica le envió una foto privada a un chico cuando salían juntos. Ahora lo han dejado y él quiere reenviarla al grupo de la cuadrilla.</a:t>
             </a:r>
           </a:p>
         </p:txBody>
@@ -8248,7 +8248,7 @@
                 </a:solidFill>
                 <a:latin typeface="Nunito Sans"/>
               </a:rPr>
-              <a:t>¿Naiara dio permiso para que la vieran otros? No: la envió solo a Iker.</a:t>
+              <a:t>¿Dio ella permiso para que la vieran otros? No: la envió solo a él.</a:t>
             </a:r>
           </a:p>
           <a:p>
@@ -8341,7 +8341,7 @@
                 </a:solidFill>
                 <a:latin typeface="Nunito Sans"/>
               </a:rPr>
-              <a:t>Conclusión: sin un sí claro de Naiara, no se reenvía. Y ella puede cambiar de opinión.</a:t>
+              <a:t>Conclusión: sin un sí claro de ella, no se reenvía. Y ella puede cambiar de opinión.</a:t>
             </a:r>
           </a:p>
         </p:txBody>
